--- a/assets/pptx/catalog-29.pptx
+++ b/assets/pptx/catalog-29.pptx
@@ -3401,7 +3401,7 @@
                 <a:ea typeface="Ebrima"/>
                 <a:cs typeface="Ebrima"/>
               </a:rPr>
-              <a:t>መለኪያ የለው መስፈሪያ የለው እንዴት ታላቅ (2X)</a:t>
+              <a:t>መለኪያ የለው መስፈሪያ የለው እንዴት ታላቅ 2X</a:t>
             </a:r>
           </a:p>
           <a:p>
@@ -3563,7 +3563,7 @@
                 <a:ea typeface="Ebrima"/>
                 <a:cs typeface="Ebrima"/>
               </a:rPr>
-              <a:t>እንዴት እንዴት እንዴት ታላቅ ነው (2X) እንዴት ኧረ እንዴት</a:t>
+              <a:t>እንዴት እንዴት እንዴት ታላቅ ነው 2X እንዴት ኧረ እንዴት</a:t>
             </a:r>
           </a:p>
           <a:p>
@@ -3581,7 +3581,7 @@
                 <a:ea typeface="Ebrima"/>
                 <a:cs typeface="Ebrima"/>
               </a:rPr>
-              <a:t>እንዴት እንዴት እንዴት ታላቅ ነው (2X) እንዴት ያንተ ምህረት</a:t>
+              <a:t>እንዴት እንዴት እንዴት ታላቅ ነው 2X እንዴት ያንተ ምህረት</a:t>
             </a:r>
           </a:p>
         </p:txBody>
